--- a/docs/relatorios/Apresentacao_Sistema_UEECM_v2.pptx
+++ b/docs/relatorios/Apresentacao_Sistema_UEECM_v2.pptx
@@ -18512,7 +18512,7 @@
                 <a:ea typeface="Calibri" pitchFamily="34" charset="-122"/>
                 <a:cs typeface="Calibri" pitchFamily="34" charset="-120"/>
               </a:rPr>
-              <a:t>✅</a:t>
+              <a:t>OK</a:t>
             </a:r>
             <a:endParaRPr lang="en-US" sz="1200" dirty="0"/>
           </a:p>
@@ -18681,7 +18681,7 @@
                 <a:ea typeface="Calibri" pitchFamily="34" charset="-122"/>
                 <a:cs typeface="Calibri" pitchFamily="34" charset="-120"/>
               </a:rPr>
-              <a:t>✅</a:t>
+              <a:t>OK</a:t>
             </a:r>
             <a:endParaRPr lang="en-US" sz="1200" dirty="0"/>
           </a:p>
@@ -18850,7 +18850,7 @@
                 <a:ea typeface="Calibri" pitchFamily="34" charset="-122"/>
                 <a:cs typeface="Calibri" pitchFamily="34" charset="-120"/>
               </a:rPr>
-              <a:t>✅</a:t>
+              <a:t>OK</a:t>
             </a:r>
             <a:endParaRPr lang="en-US" sz="1200" dirty="0"/>
           </a:p>
@@ -19019,7 +19019,7 @@
                 <a:ea typeface="Calibri" pitchFamily="34" charset="-122"/>
                 <a:cs typeface="Calibri" pitchFamily="34" charset="-120"/>
               </a:rPr>
-              <a:t>✅</a:t>
+              <a:t>OK</a:t>
             </a:r>
             <a:endParaRPr lang="en-US" sz="1200" dirty="0"/>
           </a:p>
@@ -19188,7 +19188,7 @@
                 <a:ea typeface="Calibri" pitchFamily="34" charset="-122"/>
                 <a:cs typeface="Calibri" pitchFamily="34" charset="-120"/>
               </a:rPr>
-              <a:t>✅</a:t>
+              <a:t>OK</a:t>
             </a:r>
             <a:endParaRPr lang="en-US" sz="1200" dirty="0"/>
           </a:p>
@@ -19357,7 +19357,7 @@
                 <a:ea typeface="Calibri" pitchFamily="34" charset="-122"/>
                 <a:cs typeface="Calibri" pitchFamily="34" charset="-120"/>
               </a:rPr>
-              <a:t>✅</a:t>
+              <a:t>OK</a:t>
             </a:r>
             <a:endParaRPr lang="en-US" sz="1200" dirty="0"/>
           </a:p>
@@ -19526,7 +19526,7 @@
                 <a:ea typeface="Calibri" pitchFamily="34" charset="-122"/>
                 <a:cs typeface="Calibri" pitchFamily="34" charset="-120"/>
               </a:rPr>
-              <a:t>✅</a:t>
+              <a:t>OK</a:t>
             </a:r>
             <a:endParaRPr lang="en-US" sz="1200" dirty="0"/>
           </a:p>
@@ -19695,7 +19695,7 @@
                 <a:ea typeface="Calibri" pitchFamily="34" charset="-122"/>
                 <a:cs typeface="Calibri" pitchFamily="34" charset="-120"/>
               </a:rPr>
-              <a:t>✅</a:t>
+              <a:t>OK</a:t>
             </a:r>
             <a:endParaRPr lang="en-US" sz="1200" dirty="0"/>
           </a:p>
@@ -19864,7 +19864,7 @@
                 <a:ea typeface="Calibri" pitchFamily="34" charset="-122"/>
                 <a:cs typeface="Calibri" pitchFamily="34" charset="-120"/>
               </a:rPr>
-              <a:t>🟡</a:t>
+              <a:t>!</a:t>
             </a:r>
             <a:endParaRPr lang="en-US" sz="1200" dirty="0"/>
           </a:p>
@@ -20184,7 +20184,7 @@
                 <a:ea typeface="Calibri" pitchFamily="34" charset="-122"/>
                 <a:cs typeface="Calibri" pitchFamily="34" charset="-120"/>
               </a:rPr>
-              <a:t>🟡 Ativar Leaked Password Protection (Supabase Dashboard — 5 min)</a:t>
+              <a:t>[!] Ativar Leaked Password Protection (Supabase Dashboard — 5 min)</a:t>
             </a:r>
             <a:endParaRPr lang="en-US" sz="1800" dirty="0"/>
           </a:p>
@@ -20205,7 +20205,7 @@
                 <a:ea typeface="Calibri" pitchFamily="34" charset="-122"/>
                 <a:cs typeface="Calibri" pitchFamily="34" charset="-120"/>
               </a:rPr>
-              <a:t>🟡 Auditoria a11y completa em rotas secundárias (~4h)</a:t>
+              <a:t>[!] Auditoria a11y completa em rotas secundárias (~4h)</a:t>
             </a:r>
             <a:endParaRPr lang="en-US" sz="1800" dirty="0"/>
           </a:p>
@@ -20226,7 +20226,7 @@
                 <a:ea typeface="Calibri" pitchFamily="34" charset="-122"/>
                 <a:cs typeface="Calibri" pitchFamily="34" charset="-120"/>
               </a:rPr>
-              <a:t>🔵 Observability avançada: Sentry + Cloudflare Analytics (opcional)</a:t>
+              <a:t>[+] Observability avançada: Sentry + Cloudflare Analytics (opcional)</a:t>
             </a:r>
             <a:endParaRPr lang="en-US" sz="1800" dirty="0"/>
           </a:p>
@@ -20247,7 +20247,7 @@
                 <a:ea typeface="Calibri" pitchFamily="34" charset="-122"/>
                 <a:cs typeface="Calibri" pitchFamily="34" charset="-120"/>
               </a:rPr>
-              <a:t>🔵 Backup off-site em R2/S3 externo (redundância cross-provider)</a:t>
+              <a:t>[+] Backup off-site em R2/S3 externo (redundância cross-provider)</a:t>
             </a:r>
             <a:endParaRPr lang="en-US" sz="1800" dirty="0"/>
           </a:p>
@@ -20268,7 +20268,7 @@
                 <a:ea typeface="Calibri" pitchFamily="34" charset="-122"/>
                 <a:cs typeface="Calibri" pitchFamily="34" charset="-120"/>
               </a:rPr>
-              <a:t>🔵 Testes E2E com Playwright (fluxos críticos ponta-a-ponta)</a:t>
+              <a:t>[+] Testes E2E com Playwright (fluxos críticos ponta-a-ponta)</a:t>
             </a:r>
             <a:endParaRPr lang="en-US" sz="1800" dirty="0"/>
           </a:p>
@@ -22299,7 +22299,7 @@
                 <a:ea typeface="Georgia" pitchFamily="34" charset="-122"/>
                 <a:cs typeface="Georgia" pitchFamily="34" charset="-120"/>
               </a:rPr>
-              <a:t>Coordenador</a:t>
+              <a:t>Coord.</a:t>
             </a:r>
             <a:endParaRPr lang="en-US" sz="1800" dirty="0"/>
           </a:p>
@@ -22806,7 +22806,7 @@
                 <a:ea typeface="Georgia" pitchFamily="34" charset="-122"/>
                 <a:cs typeface="Georgia" pitchFamily="34" charset="-120"/>
               </a:rPr>
-              <a:t>Desenvolvedor</a:t>
+              <a:t>Dev.</a:t>
             </a:r>
             <a:endParaRPr lang="en-US" sz="1800" dirty="0"/>
           </a:p>

--- a/docs/relatorios/Apresentacao_Sistema_UEECM_v2.pptx
+++ b/docs/relatorios/Apresentacao_Sistema_UEECM_v2.pptx
@@ -18463,7 +18463,7 @@
         <p:spPr>
           <a:xfrm>
             <a:off x="10698480" y="2130552"/>
-            <a:ext cx="329184" cy="329184"/>
+            <a:ext cx="457200" cy="329184"/>
           </a:xfrm>
           <a:prstGeom prst="ellipse">
             <a:avLst/>
@@ -18487,8 +18487,8 @@
         </p:nvSpPr>
         <p:spPr>
           <a:xfrm>
-            <a:off x="10698480" y="2130552"/>
-            <a:ext cx="329184" cy="329184"/>
+            <a:off x="10652760" y="2130552"/>
+            <a:ext cx="457200" cy="329184"/>
           </a:xfrm>
           <a:prstGeom prst="rect">
             <a:avLst/>
@@ -18504,7 +18504,7 @@
               <a:buNone/>
             </a:pPr>
             <a:r>
-              <a:rPr lang="en-US" sz="1200" dirty="0">
+              <a:rPr lang="en-US" sz="1200" b="1" dirty="0">
                 <a:solidFill>
                   <a:srgbClr val="FFFFFF"/>
                 </a:solidFill>
@@ -18632,7 +18632,7 @@
         <p:spPr>
           <a:xfrm>
             <a:off x="10698480" y="2587752"/>
-            <a:ext cx="329184" cy="329184"/>
+            <a:ext cx="457200" cy="329184"/>
           </a:xfrm>
           <a:prstGeom prst="ellipse">
             <a:avLst/>
@@ -18656,8 +18656,8 @@
         </p:nvSpPr>
         <p:spPr>
           <a:xfrm>
-            <a:off x="10698480" y="2587752"/>
-            <a:ext cx="329184" cy="329184"/>
+            <a:off x="10652760" y="2587752"/>
+            <a:ext cx="457200" cy="329184"/>
           </a:xfrm>
           <a:prstGeom prst="rect">
             <a:avLst/>
@@ -18673,7 +18673,7 @@
               <a:buNone/>
             </a:pPr>
             <a:r>
-              <a:rPr lang="en-US" sz="1200" dirty="0">
+              <a:rPr lang="en-US" sz="1200" b="1" dirty="0">
                 <a:solidFill>
                   <a:srgbClr val="FFFFFF"/>
                 </a:solidFill>
@@ -18801,7 +18801,7 @@
         <p:spPr>
           <a:xfrm>
             <a:off x="10698480" y="3044952"/>
-            <a:ext cx="329184" cy="329184"/>
+            <a:ext cx="457200" cy="329184"/>
           </a:xfrm>
           <a:prstGeom prst="ellipse">
             <a:avLst/>
@@ -18825,8 +18825,8 @@
         </p:nvSpPr>
         <p:spPr>
           <a:xfrm>
-            <a:off x="10698480" y="3044952"/>
-            <a:ext cx="329184" cy="329184"/>
+            <a:off x="10652760" y="3044952"/>
+            <a:ext cx="457200" cy="329184"/>
           </a:xfrm>
           <a:prstGeom prst="rect">
             <a:avLst/>
@@ -18842,7 +18842,7 @@
               <a:buNone/>
             </a:pPr>
             <a:r>
-              <a:rPr lang="en-US" sz="1200" dirty="0">
+              <a:rPr lang="en-US" sz="1200" b="1" dirty="0">
                 <a:solidFill>
                   <a:srgbClr val="FFFFFF"/>
                 </a:solidFill>
@@ -18970,7 +18970,7 @@
         <p:spPr>
           <a:xfrm>
             <a:off x="10698480" y="3502152"/>
-            <a:ext cx="329184" cy="329184"/>
+            <a:ext cx="457200" cy="329184"/>
           </a:xfrm>
           <a:prstGeom prst="ellipse">
             <a:avLst/>
@@ -18994,8 +18994,8 @@
         </p:nvSpPr>
         <p:spPr>
           <a:xfrm>
-            <a:off x="10698480" y="3502152"/>
-            <a:ext cx="329184" cy="329184"/>
+            <a:off x="10652760" y="3502152"/>
+            <a:ext cx="457200" cy="329184"/>
           </a:xfrm>
           <a:prstGeom prst="rect">
             <a:avLst/>
@@ -19011,7 +19011,7 @@
               <a:buNone/>
             </a:pPr>
             <a:r>
-              <a:rPr lang="en-US" sz="1200" dirty="0">
+              <a:rPr lang="en-US" sz="1200" b="1" dirty="0">
                 <a:solidFill>
                   <a:srgbClr val="FFFFFF"/>
                 </a:solidFill>
@@ -19139,7 +19139,7 @@
         <p:spPr>
           <a:xfrm>
             <a:off x="10698480" y="3959352"/>
-            <a:ext cx="329184" cy="329184"/>
+            <a:ext cx="457200" cy="329184"/>
           </a:xfrm>
           <a:prstGeom prst="ellipse">
             <a:avLst/>
@@ -19163,8 +19163,8 @@
         </p:nvSpPr>
         <p:spPr>
           <a:xfrm>
-            <a:off x="10698480" y="3959352"/>
-            <a:ext cx="329184" cy="329184"/>
+            <a:off x="10652760" y="3959352"/>
+            <a:ext cx="457200" cy="329184"/>
           </a:xfrm>
           <a:prstGeom prst="rect">
             <a:avLst/>
@@ -19180,7 +19180,7 @@
               <a:buNone/>
             </a:pPr>
             <a:r>
-              <a:rPr lang="en-US" sz="1200" dirty="0">
+              <a:rPr lang="en-US" sz="1200" b="1" dirty="0">
                 <a:solidFill>
                   <a:srgbClr val="FFFFFF"/>
                 </a:solidFill>
@@ -19308,7 +19308,7 @@
         <p:spPr>
           <a:xfrm>
             <a:off x="10698480" y="4416552"/>
-            <a:ext cx="329184" cy="329184"/>
+            <a:ext cx="457200" cy="329184"/>
           </a:xfrm>
           <a:prstGeom prst="ellipse">
             <a:avLst/>
@@ -19332,8 +19332,8 @@
         </p:nvSpPr>
         <p:spPr>
           <a:xfrm>
-            <a:off x="10698480" y="4416552"/>
-            <a:ext cx="329184" cy="329184"/>
+            <a:off x="10652760" y="4416552"/>
+            <a:ext cx="457200" cy="329184"/>
           </a:xfrm>
           <a:prstGeom prst="rect">
             <a:avLst/>
@@ -19349,7 +19349,7 @@
               <a:buNone/>
             </a:pPr>
             <a:r>
-              <a:rPr lang="en-US" sz="1200" dirty="0">
+              <a:rPr lang="en-US" sz="1200" b="1" dirty="0">
                 <a:solidFill>
                   <a:srgbClr val="FFFFFF"/>
                 </a:solidFill>
@@ -19477,7 +19477,7 @@
         <p:spPr>
           <a:xfrm>
             <a:off x="10698480" y="4873752"/>
-            <a:ext cx="329184" cy="329184"/>
+            <a:ext cx="457200" cy="329184"/>
           </a:xfrm>
           <a:prstGeom prst="ellipse">
             <a:avLst/>
@@ -19501,8 +19501,8 @@
         </p:nvSpPr>
         <p:spPr>
           <a:xfrm>
-            <a:off x="10698480" y="4873752"/>
-            <a:ext cx="329184" cy="329184"/>
+            <a:off x="10652760" y="4873752"/>
+            <a:ext cx="457200" cy="329184"/>
           </a:xfrm>
           <a:prstGeom prst="rect">
             <a:avLst/>
@@ -19518,7 +19518,7 @@
               <a:buNone/>
             </a:pPr>
             <a:r>
-              <a:rPr lang="en-US" sz="1200" dirty="0">
+              <a:rPr lang="en-US" sz="1200" b="1" dirty="0">
                 <a:solidFill>
                   <a:srgbClr val="FFFFFF"/>
                 </a:solidFill>
@@ -19646,7 +19646,7 @@
         <p:spPr>
           <a:xfrm>
             <a:off x="10698480" y="5330952"/>
-            <a:ext cx="329184" cy="329184"/>
+            <a:ext cx="457200" cy="329184"/>
           </a:xfrm>
           <a:prstGeom prst="ellipse">
             <a:avLst/>
@@ -19670,8 +19670,8 @@
         </p:nvSpPr>
         <p:spPr>
           <a:xfrm>
-            <a:off x="10698480" y="5330952"/>
-            <a:ext cx="329184" cy="329184"/>
+            <a:off x="10652760" y="5330952"/>
+            <a:ext cx="457200" cy="329184"/>
           </a:xfrm>
           <a:prstGeom prst="rect">
             <a:avLst/>
@@ -19687,7 +19687,7 @@
               <a:buNone/>
             </a:pPr>
             <a:r>
-              <a:rPr lang="en-US" sz="1200" dirty="0">
+              <a:rPr lang="en-US" sz="1200" b="1" dirty="0">
                 <a:solidFill>
                   <a:srgbClr val="FFFFFF"/>
                 </a:solidFill>
@@ -19815,7 +19815,7 @@
         <p:spPr>
           <a:xfrm>
             <a:off x="10698480" y="5788152"/>
-            <a:ext cx="329184" cy="329184"/>
+            <a:ext cx="457200" cy="329184"/>
           </a:xfrm>
           <a:prstGeom prst="ellipse">
             <a:avLst/>
@@ -19839,8 +19839,8 @@
         </p:nvSpPr>
         <p:spPr>
           <a:xfrm>
-            <a:off x="10698480" y="5788152"/>
-            <a:ext cx="329184" cy="329184"/>
+            <a:off x="10652760" y="5788152"/>
+            <a:ext cx="457200" cy="329184"/>
           </a:xfrm>
           <a:prstGeom prst="rect">
             <a:avLst/>
@@ -19856,7 +19856,7 @@
               <a:buNone/>
             </a:pPr>
             <a:r>
-              <a:rPr lang="en-US" sz="1200" dirty="0">
+              <a:rPr lang="en-US" sz="1200" b="1" dirty="0">
                 <a:solidFill>
                   <a:srgbClr val="FFFFFF"/>
                 </a:solidFill>
